--- a/assets/TCS302/Unit-1/Lecture10_Postfix_Evaluation_Recursion_Hanoi.pptx
+++ b/assets/TCS302/Unit-1/Lecture10_Postfix_Evaluation_Recursion_Hanoi.pptx
@@ -3165,90 +3165,6 @@
           </a:p>
         </p:txBody>
       </p:sp>
-      <p:sp>
-        <p:nvSpPr>
-          <p:cNvPr id="19" name="Shape 17"/>
-          <p:cNvSpPr/>
-          <p:nvPr/>
-        </p:nvSpPr>
-        <p:spPr>
-          <a:xfrm>
-            <a:off x="457200" y="4434840"/>
-            <a:ext cx="8229600" cy="502920"/>
-          </a:xfrm>
-          <a:prstGeom prst="roundRect">
-            <a:avLst>
-              <a:gd name="adj" fmla="val 12727"/>
-            </a:avLst>
-          </a:prstGeom>
-          <a:solidFill>
-            <a:srgbClr val="EEF3FB"/>
-          </a:solidFill>
-          <a:ln w="12700">
-            <a:solidFill>
-              <a:srgbClr val="1E2761"/>
-            </a:solidFill>
-            <a:prstDash val="solid"/>
-          </a:ln>
-        </p:spPr>
-        <p:txBody>
-          <a:bodyPr/>
-          <a:lstStyle/>
-          <a:p>
-            <a:endParaRPr lang="en-IN"/>
-          </a:p>
-        </p:txBody>
-      </p:sp>
-      <p:sp>
-        <p:nvSpPr>
-          <p:cNvPr id="20" name="Text 18"/>
-          <p:cNvSpPr/>
-          <p:nvPr/>
-        </p:nvSpPr>
-        <p:spPr>
-          <a:xfrm>
-            <a:off x="640080" y="4434840"/>
-            <a:ext cx="7863840" cy="502920"/>
-          </a:xfrm>
-          <a:prstGeom prst="rect">
-            <a:avLst/>
-          </a:prstGeom>
-          <a:noFill/>
-          <a:ln/>
-        </p:spPr>
-        <p:txBody>
-          <a:bodyPr wrap="square" lIns="0" tIns="0" rIns="0" bIns="0" rtlCol="0" anchor="ctr"/>
-          <a:lstStyle/>
-          <a:p>
-            <a:pPr marL="0" indent="0">
-              <a:buNone/>
-            </a:pPr>
-            <a:r>
-              <a:rPr lang="en-US" sz="1200" b="1" dirty="0">
-                <a:solidFill>
-                  <a:srgbClr val="1E2761"/>
-                </a:solidFill>
-                <a:latin typeface="Calibri" pitchFamily="34" charset="0"/>
-                <a:ea typeface="Calibri" pitchFamily="34" charset="-122"/>
-                <a:cs typeface="Calibri" pitchFamily="34" charset="-120"/>
-              </a:rPr>
-              <a:t>ASK   </a:t>
-            </a:r>
-            <a:r>
-              <a:rPr lang="en-US" sz="1250" i="1" dirty="0">
-                <a:solidFill>
-                  <a:srgbClr val="2B2B2B"/>
-                </a:solidFill>
-                <a:latin typeface="Calibri" pitchFamily="34" charset="0"/>
-                <a:ea typeface="Calibri" pitchFamily="34" charset="-122"/>
-                <a:cs typeface="Calibri" pitchFamily="34" charset="-120"/>
-              </a:rPr>
-              <a:t>Before any theory — try to move 3 disks yourself. What is the FIRST move, and why?</a:t>
-            </a:r>
-            <a:endParaRPr lang="en-US" sz="1200" dirty="0"/>
-          </a:p>
-        </p:txBody>
-      </p:sp>
     </p:spTree>
   </p:cSld>
   <p:clrMapOvr>
@@ -3951,7 +3867,7 @@
         </p:nvGraphicFramePr>
         <p:xfrm>
           <a:off x="457200" y="1188720"/>
-          <a:ext cx="8229600" cy="914400"/>
+          <a:ext cx="8229600" cy="3072384"/>
         </p:xfrm>
         <a:graphic>
           <a:graphicData uri="http://schemas.openxmlformats.org/drawingml/2006/table">
@@ -6286,90 +6202,6 @@
           </a:p>
         </p:txBody>
       </p:sp>
-      <p:sp>
-        <p:nvSpPr>
-          <p:cNvPr id="11" name="Shape 9"/>
-          <p:cNvSpPr/>
-          <p:nvPr/>
-        </p:nvSpPr>
-        <p:spPr>
-          <a:xfrm>
-            <a:off x="457200" y="4526280"/>
-            <a:ext cx="8229600" cy="457200"/>
-          </a:xfrm>
-          <a:prstGeom prst="roundRect">
-            <a:avLst>
-              <a:gd name="adj" fmla="val 14000"/>
-            </a:avLst>
-          </a:prstGeom>
-          <a:solidFill>
-            <a:srgbClr val="EEF3FB"/>
-          </a:solidFill>
-          <a:ln w="12700">
-            <a:solidFill>
-              <a:srgbClr val="1E2761"/>
-            </a:solidFill>
-            <a:prstDash val="solid"/>
-          </a:ln>
-        </p:spPr>
-        <p:txBody>
-          <a:bodyPr/>
-          <a:lstStyle/>
-          <a:p>
-            <a:endParaRPr lang="en-IN"/>
-          </a:p>
-        </p:txBody>
-      </p:sp>
-      <p:sp>
-        <p:nvSpPr>
-          <p:cNvPr id="12" name="Text 10"/>
-          <p:cNvSpPr/>
-          <p:nvPr/>
-        </p:nvSpPr>
-        <p:spPr>
-          <a:xfrm>
-            <a:off x="640080" y="4526280"/>
-            <a:ext cx="7863840" cy="457200"/>
-          </a:xfrm>
-          <a:prstGeom prst="rect">
-            <a:avLst/>
-          </a:prstGeom>
-          <a:noFill/>
-          <a:ln/>
-        </p:spPr>
-        <p:txBody>
-          <a:bodyPr wrap="square" lIns="0" tIns="0" rIns="0" bIns="0" rtlCol="0" anchor="ctr"/>
-          <a:lstStyle/>
-          <a:p>
-            <a:pPr marL="0" indent="0">
-              <a:buNone/>
-            </a:pPr>
-            <a:r>
-              <a:rPr lang="en-US" sz="1200" b="1" dirty="0">
-                <a:solidFill>
-                  <a:srgbClr val="1E2761"/>
-                </a:solidFill>
-                <a:latin typeface="Calibri" pitchFamily="34" charset="0"/>
-                <a:ea typeface="Calibri" pitchFamily="34" charset="-122"/>
-                <a:cs typeface="Calibri" pitchFamily="34" charset="-120"/>
-              </a:rPr>
-              <a:t>ASK   </a:t>
-            </a:r>
-            <a:r>
-              <a:rPr lang="en-US" sz="1250" i="1" dirty="0">
-                <a:solidFill>
-                  <a:srgbClr val="2B2B2B"/>
-                </a:solidFill>
-                <a:latin typeface="Calibri" pitchFamily="34" charset="0"/>
-                <a:ea typeface="Calibri" pitchFamily="34" charset="-122"/>
-                <a:cs typeface="Calibri" pitchFamily="34" charset="-120"/>
-              </a:rPr>
-              <a:t>Call it as factorialTail(4, 1). Trace the two arguments at each call — where does the answer build up?</a:t>
-            </a:r>
-            <a:endParaRPr lang="en-US" sz="1200" dirty="0"/>
-          </a:p>
-        </p:txBody>
-      </p:sp>
     </p:spTree>
   </p:cSld>
   <p:clrMapOvr>
@@ -7143,45 +6975,6 @@
           </a:p>
         </p:txBody>
       </p:sp>
-      <p:sp>
-        <p:nvSpPr>
-          <p:cNvPr id="7" name="Text 5"/>
-          <p:cNvSpPr/>
-          <p:nvPr/>
-        </p:nvSpPr>
-        <p:spPr>
-          <a:xfrm>
-            <a:off x="640080" y="4800600"/>
-            <a:ext cx="7863840" cy="274320"/>
-          </a:xfrm>
-          <a:prstGeom prst="rect">
-            <a:avLst/>
-          </a:prstGeom>
-          <a:noFill/>
-          <a:ln/>
-        </p:spPr>
-        <p:txBody>
-          <a:bodyPr wrap="square" lIns="0" tIns="0" rIns="0" bIns="0" rtlCol="0" anchor="ctr"/>
-          <a:lstStyle/>
-          <a:p>
-            <a:pPr marL="0" indent="0">
-              <a:buNone/>
-            </a:pPr>
-            <a:r>
-              <a:rPr lang="en-US" sz="1100" i="1" dirty="0">
-                <a:solidFill>
-                  <a:srgbClr val="CADCFC"/>
-                </a:solidFill>
-                <a:latin typeface="Calibri" pitchFamily="34" charset="0"/>
-                <a:ea typeface="Calibri" pitchFamily="34" charset="-122"/>
-                <a:cs typeface="Calibri" pitchFamily="34" charset="-120"/>
-              </a:rPr>
-              <a:t>Next: Unit II — queues: FIFO, the opposite discipline</a:t>
-            </a:r>
-            <a:endParaRPr lang="en-US" sz="1100" dirty="0"/>
-          </a:p>
-        </p:txBody>
-      </p:sp>
     </p:spTree>
   </p:cSld>
   <p:clrMapOvr>
@@ -7570,90 +7363,6 @@
               <a:t>Conversion stacked operators; evaluation stacks operands. Two stacks, two jobs.</a:t>
             </a:r>
             <a:endParaRPr lang="en-US" sz="1350" dirty="0"/>
-          </a:p>
-        </p:txBody>
-      </p:sp>
-      <p:sp>
-        <p:nvSpPr>
-          <p:cNvPr id="11" name="Shape 9"/>
-          <p:cNvSpPr/>
-          <p:nvPr/>
-        </p:nvSpPr>
-        <p:spPr>
-          <a:xfrm>
-            <a:off x="457200" y="4434840"/>
-            <a:ext cx="8229600" cy="502920"/>
-          </a:xfrm>
-          <a:prstGeom prst="roundRect">
-            <a:avLst>
-              <a:gd name="adj" fmla="val 12727"/>
-            </a:avLst>
-          </a:prstGeom>
-          <a:solidFill>
-            <a:srgbClr val="EEF3FB"/>
-          </a:solidFill>
-          <a:ln w="12700">
-            <a:solidFill>
-              <a:srgbClr val="1E2761"/>
-            </a:solidFill>
-            <a:prstDash val="solid"/>
-          </a:ln>
-        </p:spPr>
-        <p:txBody>
-          <a:bodyPr/>
-          <a:lstStyle/>
-          <a:p>
-            <a:endParaRPr lang="en-IN"/>
-          </a:p>
-        </p:txBody>
-      </p:sp>
-      <p:sp>
-        <p:nvSpPr>
-          <p:cNvPr id="12" name="Text 10"/>
-          <p:cNvSpPr/>
-          <p:nvPr/>
-        </p:nvSpPr>
-        <p:spPr>
-          <a:xfrm>
-            <a:off x="640080" y="4434840"/>
-            <a:ext cx="7863840" cy="502920"/>
-          </a:xfrm>
-          <a:prstGeom prst="rect">
-            <a:avLst/>
-          </a:prstGeom>
-          <a:noFill/>
-          <a:ln/>
-        </p:spPr>
-        <p:txBody>
-          <a:bodyPr wrap="square" lIns="0" tIns="0" rIns="0" bIns="0" rtlCol="0" anchor="ctr"/>
-          <a:lstStyle/>
-          <a:p>
-            <a:pPr marL="0" indent="0">
-              <a:buNone/>
-            </a:pPr>
-            <a:r>
-              <a:rPr lang="en-US" sz="1200" b="1" dirty="0">
-                <a:solidFill>
-                  <a:srgbClr val="1E2761"/>
-                </a:solidFill>
-                <a:latin typeface="Calibri" pitchFamily="34" charset="0"/>
-                <a:ea typeface="Calibri" pitchFamily="34" charset="-122"/>
-                <a:cs typeface="Calibri" pitchFamily="34" charset="-120"/>
-              </a:rPr>
-              <a:t>ASK   </a:t>
-            </a:r>
-            <a:r>
-              <a:rPr lang="en-US" sz="1250" i="1" dirty="0">
-                <a:solidFill>
-                  <a:srgbClr val="2B2B2B"/>
-                </a:solidFill>
-                <a:latin typeface="Calibri" pitchFamily="34" charset="0"/>
-                <a:ea typeface="Calibri" pitchFamily="34" charset="-122"/>
-                <a:cs typeface="Calibri" pitchFamily="34" charset="-120"/>
-              </a:rPr>
-              <a:t>Why is postfix easier for a machine than infix?  (Hint: what two things disappear?)</a:t>
-            </a:r>
-            <a:endParaRPr lang="en-US" sz="1200" dirty="0"/>
           </a:p>
         </p:txBody>
       </p:sp>
@@ -10744,90 +10453,6 @@
           </a:p>
         </p:txBody>
       </p:sp>
-      <p:sp>
-        <p:nvSpPr>
-          <p:cNvPr id="9" name="Shape 7"/>
-          <p:cNvSpPr/>
-          <p:nvPr/>
-        </p:nvSpPr>
-        <p:spPr>
-          <a:xfrm>
-            <a:off x="4983480" y="3931920"/>
-            <a:ext cx="3703320" cy="777240"/>
-          </a:xfrm>
-          <a:prstGeom prst="roundRect">
-            <a:avLst>
-              <a:gd name="adj" fmla="val 8235"/>
-            </a:avLst>
-          </a:prstGeom>
-          <a:solidFill>
-            <a:srgbClr val="EEF3FB"/>
-          </a:solidFill>
-          <a:ln w="12700">
-            <a:solidFill>
-              <a:srgbClr val="1E2761"/>
-            </a:solidFill>
-            <a:prstDash val="solid"/>
-          </a:ln>
-        </p:spPr>
-        <p:txBody>
-          <a:bodyPr/>
-          <a:lstStyle/>
-          <a:p>
-            <a:endParaRPr lang="en-IN"/>
-          </a:p>
-        </p:txBody>
-      </p:sp>
-      <p:sp>
-        <p:nvSpPr>
-          <p:cNvPr id="10" name="Text 8"/>
-          <p:cNvSpPr/>
-          <p:nvPr/>
-        </p:nvSpPr>
-        <p:spPr>
-          <a:xfrm>
-            <a:off x="5166360" y="3931920"/>
-            <a:ext cx="3337560" cy="777240"/>
-          </a:xfrm>
-          <a:prstGeom prst="rect">
-            <a:avLst/>
-          </a:prstGeom>
-          <a:noFill/>
-          <a:ln/>
-        </p:spPr>
-        <p:txBody>
-          <a:bodyPr wrap="square" lIns="0" tIns="0" rIns="0" bIns="0" rtlCol="0" anchor="ctr"/>
-          <a:lstStyle/>
-          <a:p>
-            <a:pPr marL="0" indent="0">
-              <a:buNone/>
-            </a:pPr>
-            <a:r>
-              <a:rPr lang="en-US" sz="1200" b="1" dirty="0">
-                <a:solidFill>
-                  <a:srgbClr val="1E2761"/>
-                </a:solidFill>
-                <a:latin typeface="Calibri" pitchFamily="34" charset="0"/>
-                <a:ea typeface="Calibri" pitchFamily="34" charset="-122"/>
-                <a:cs typeface="Calibri" pitchFamily="34" charset="-120"/>
-              </a:rPr>
-              <a:t>ASK   </a:t>
-            </a:r>
-            <a:r>
-              <a:rPr lang="en-US" sz="1250" i="1" dirty="0">
-                <a:solidFill>
-                  <a:srgbClr val="2B2B2B"/>
-                </a:solidFill>
-                <a:latin typeface="Calibri" pitchFamily="34" charset="0"/>
-                <a:ea typeface="Calibri" pitchFamily="34" charset="-122"/>
-                <a:cs typeface="Calibri" pitchFamily="34" charset="-120"/>
-              </a:rPr>
-              <a:t>Which two safety checks did we leave out, and when exactly would each one save us?</a:t>
-            </a:r>
-            <a:endParaRPr lang="en-US" sz="1200" dirty="0"/>
-          </a:p>
-        </p:txBody>
-      </p:sp>
     </p:spTree>
   </p:cSld>
   <p:clrMapOvr>
@@ -11017,8 +10642,8 @@
         </p:nvSpPr>
         <p:spPr>
           <a:xfrm>
-            <a:off x="457200" y="1188720"/>
-            <a:ext cx="5120640" cy="3611880"/>
+            <a:off x="457200" y="947650"/>
+            <a:ext cx="5120640" cy="3898669"/>
           </a:xfrm>
           <a:prstGeom prst="roundRect">
             <a:avLst>
@@ -11051,7 +10676,7 @@
         </p:nvSpPr>
         <p:spPr>
           <a:xfrm>
-            <a:off x="594360" y="1280160"/>
+            <a:off x="594360" y="972589"/>
             <a:ext cx="4846320" cy="3429000"/>
           </a:xfrm>
           <a:prstGeom prst="rect">
@@ -13362,90 +12987,6 @@
               <a:t>No base case = pushes never stop = the stack fills up: stack overflow.</a:t>
             </a:r>
             <a:endParaRPr lang="en-US" sz="1300" dirty="0"/>
-          </a:p>
-        </p:txBody>
-      </p:sp>
-      <p:sp>
-        <p:nvSpPr>
-          <p:cNvPr id="18" name="Shape 16"/>
-          <p:cNvSpPr/>
-          <p:nvPr/>
-        </p:nvSpPr>
-        <p:spPr>
-          <a:xfrm>
-            <a:off x="457200" y="4434840"/>
-            <a:ext cx="8229600" cy="502920"/>
-          </a:xfrm>
-          <a:prstGeom prst="roundRect">
-            <a:avLst>
-              <a:gd name="adj" fmla="val 12727"/>
-            </a:avLst>
-          </a:prstGeom>
-          <a:solidFill>
-            <a:srgbClr val="EEF3FB"/>
-          </a:solidFill>
-          <a:ln w="12700">
-            <a:solidFill>
-              <a:srgbClr val="1E2761"/>
-            </a:solidFill>
-            <a:prstDash val="solid"/>
-          </a:ln>
-        </p:spPr>
-        <p:txBody>
-          <a:bodyPr/>
-          <a:lstStyle/>
-          <a:p>
-            <a:endParaRPr lang="en-IN"/>
-          </a:p>
-        </p:txBody>
-      </p:sp>
-      <p:sp>
-        <p:nvSpPr>
-          <p:cNvPr id="19" name="Text 17"/>
-          <p:cNvSpPr/>
-          <p:nvPr/>
-        </p:nvSpPr>
-        <p:spPr>
-          <a:xfrm>
-            <a:off x="640080" y="4434840"/>
-            <a:ext cx="7863840" cy="502920"/>
-          </a:xfrm>
-          <a:prstGeom prst="rect">
-            <a:avLst/>
-          </a:prstGeom>
-          <a:noFill/>
-          <a:ln/>
-        </p:spPr>
-        <p:txBody>
-          <a:bodyPr wrap="square" lIns="0" tIns="0" rIns="0" bIns="0" rtlCol="0" anchor="ctr"/>
-          <a:lstStyle/>
-          <a:p>
-            <a:pPr marL="0" indent="0">
-              <a:buNone/>
-            </a:pPr>
-            <a:r>
-              <a:rPr lang="en-US" sz="1200" b="1" dirty="0">
-                <a:solidFill>
-                  <a:srgbClr val="1E2761"/>
-                </a:solidFill>
-                <a:latin typeface="Calibri" pitchFamily="34" charset="0"/>
-                <a:ea typeface="Calibri" pitchFamily="34" charset="-122"/>
-                <a:cs typeface="Calibri" pitchFamily="34" charset="-120"/>
-              </a:rPr>
-              <a:t>ASK   </a:t>
-            </a:r>
-            <a:r>
-              <a:rPr lang="en-US" sz="1250" i="1" dirty="0">
-                <a:solidFill>
-                  <a:srgbClr val="2B2B2B"/>
-                </a:solidFill>
-                <a:latin typeface="Calibri" pitchFamily="34" charset="0"/>
-                <a:ea typeface="Calibri" pitchFamily="34" charset="-122"/>
-                <a:cs typeface="Calibri" pitchFamily="34" charset="-120"/>
-              </a:rPr>
-              <a:t>How many frames are on the stack at the deepest moment of factorial(4)?  Of factorial(n)?</a:t>
-            </a:r>
-            <a:endParaRPr lang="en-US" sz="1200" dirty="0"/>
           </a:p>
         </p:txBody>
       </p:sp>
